--- a/templates/posts/october/01-10-2026-thu-li-boubacar-option-b-brown.pptx
+++ b/templates/posts/october/01-10-2026-thu-li-boubacar-option-b-brown.pptx
@@ -3570,7 +3570,7 @@
       </p:sp>
       <p:pic>
         <p:nvPicPr>
-          <p:cNvPr id="3" name="Picture 2" descr="7723282248582961913.jpg"/>
+          <p:cNvPr id="3" name="Picture 2" descr="4870732851349854214.jpg"/>
           <p:cNvPicPr>
             <a:picLocks noChangeAspect="1"/>
           </p:cNvPicPr>

--- a/templates/posts/october/01-10-2026-thu-li-boubacar-option-b-brown.pptx
+++ b/templates/posts/october/01-10-2026-thu-li-boubacar-option-b-brown.pptx
@@ -3570,7 +3570,7 @@
       </p:sp>
       <p:pic>
         <p:nvPicPr>
-          <p:cNvPr id="3" name="Picture 2" descr="4870732851349854214.jpg"/>
+          <p:cNvPr id="3" name="Picture 2" descr="4154960425028164057.jpg"/>
           <p:cNvPicPr>
             <a:picLocks noChangeAspect="1"/>
           </p:cNvPicPr>

--- a/templates/posts/october/01-10-2026-thu-li-boubacar-option-b-brown.pptx
+++ b/templates/posts/october/01-10-2026-thu-li-boubacar-option-b-brown.pptx
@@ -3570,7 +3570,7 @@
       </p:sp>
       <p:pic>
         <p:nvPicPr>
-          <p:cNvPr id="3" name="Picture 2" descr="4154960425028164057.jpg"/>
+          <p:cNvPr id="3" name="Picture 2" descr="5911525714073799589.jpg"/>
           <p:cNvPicPr>
             <a:picLocks noChangeAspect="1"/>
           </p:cNvPicPr>

--- a/templates/posts/october/01-10-2026-thu-li-boubacar-option-b-brown.pptx
+++ b/templates/posts/october/01-10-2026-thu-li-boubacar-option-b-brown.pptx
@@ -3570,7 +3570,7 @@
       </p:sp>
       <p:pic>
         <p:nvPicPr>
-          <p:cNvPr id="3" name="Picture 2" descr="5911525714073799589.jpg"/>
+          <p:cNvPr id="3" name="Picture 2" descr="940872279443182179.jpg"/>
           <p:cNvPicPr>
             <a:picLocks noChangeAspect="1"/>
           </p:cNvPicPr>

--- a/templates/posts/october/01-10-2026-thu-li-boubacar-option-b-brown.pptx
+++ b/templates/posts/october/01-10-2026-thu-li-boubacar-option-b-brown.pptx
@@ -3570,7 +3570,7 @@
       </p:sp>
       <p:pic>
         <p:nvPicPr>
-          <p:cNvPr id="3" name="Picture 2" descr="940872279443182179.jpg"/>
+          <p:cNvPr id="3" name="Picture 2" descr="2362787423585718492.jpg"/>
           <p:cNvPicPr>
             <a:picLocks noChangeAspect="1"/>
           </p:cNvPicPr>

--- a/templates/posts/october/01-10-2026-thu-li-boubacar-option-b-brown.pptx
+++ b/templates/posts/october/01-10-2026-thu-li-boubacar-option-b-brown.pptx
@@ -3570,7 +3570,7 @@
       </p:sp>
       <p:pic>
         <p:nvPicPr>
-          <p:cNvPr id="3" name="Picture 2" descr="2362787423585718492.jpg"/>
+          <p:cNvPr id="3" name="Picture 2" descr="3797098199558756604.jpg"/>
           <p:cNvPicPr>
             <a:picLocks noChangeAspect="1"/>
           </p:cNvPicPr>
